--- a/vault/blogs/2026-04-30-gpt-5-5-in-codex/slides.pptx
+++ b/vault/blogs/2026-04-30-gpt-5-5-in-codex/slides.pptx
@@ -3685,40 +3685,6 @@
       <p:sp>
         <p:nvSpPr>
           <p:cNvPr id="7" name="TextBox 6"/>
-          <p:cNvSpPr txBox="1"/>
-          <p:nvPr/>
-        </p:nvSpPr>
-        <p:spPr>
-          <a:xfrm>
-            <a:off x="731520" y="4754880"/>
-            <a:ext cx="10698480" cy="960120"/>
-          </a:xfrm>
-          <a:prstGeom prst="rect">
-            <a:avLst/>
-          </a:prstGeom>
-          <a:noFill/>
-        </p:spPr>
-        <p:txBody>
-          <a:bodyPr wrap="square">
-            <a:spAutoFit/>
-          </a:bodyPr>
-          <a:lstStyle/>
-          <a:p>
-            <a:pPr algn="l"/>
-            <a:r>
-              <a:rPr sz="1700" b="0">
-                <a:solidFill>
-                  <a:srgbClr val="FFFFFF"/>
-                </a:solidFill>
-              </a:rPr>
-              <a:t>  To illustrate the impact of this architectural shift, consider a common 5-step coding task: "Refactor a legacy Express.j</a:t>
-            </a:r>
-          </a:p>
-        </p:txBody>
-      </p:sp>
-      <p:sp>
-        <p:nvSpPr>
-          <p:cNvPr id="8" name="TextBox 7"/>
           <p:cNvSpPr txBox="1"/>
           <p:nvPr/>
         </p:nvSpPr>

--- a/vault/blogs/2026-04-30-gpt-5-5-in-codex/slides.pptx
+++ b/vault/blogs/2026-04-30-gpt-5-5-in-codex/slides.pptx
@@ -4428,7 +4428,7 @@
                   <a:srgbClr val="FFFFFF"/>
                 </a:solidFill>
               </a:rPr>
-              <a:t>  The integration with Amazon Bedrock Managed Agents is particularly powerful. Codex's permission profiles — which round-t</a:t>
+              <a:t>  The integration with Amazon Bedrock Managed Agents is particularly powerful.</a:t>
             </a:r>
           </a:p>
         </p:txBody>
@@ -4436,6 +4436,40 @@
       <p:sp>
         <p:nvSpPr>
           <p:cNvPr id="6" name="TextBox 5"/>
+          <p:cNvSpPr txBox="1"/>
+          <p:nvPr/>
+        </p:nvSpPr>
+        <p:spPr>
+          <a:xfrm>
+            <a:off x="731520" y="3703320"/>
+            <a:ext cx="10698480" cy="960120"/>
+          </a:xfrm>
+          <a:prstGeom prst="rect">
+            <a:avLst/>
+          </a:prstGeom>
+          <a:noFill/>
+        </p:spPr>
+        <p:txBody>
+          <a:bodyPr wrap="square">
+            <a:spAutoFit/>
+          </a:bodyPr>
+          <a:lstStyle/>
+          <a:p>
+            <a:pPr algn="l"/>
+            <a:r>
+              <a:rPr sz="1700" b="0">
+                <a:solidFill>
+                  <a:srgbClr val="FFFFFF"/>
+                </a:solidFill>
+              </a:rPr>
+              <a:t>  Codex's permission profiles — which round-t</a:t>
+            </a:r>
+          </a:p>
+        </p:txBody>
+      </p:sp>
+      <p:sp>
+        <p:nvSpPr>
+          <p:cNvPr id="7" name="TextBox 6"/>
           <p:cNvSpPr txBox="1"/>
           <p:nvPr/>
         </p:nvSpPr>
@@ -4569,8 +4603,8 @@
         </p:nvSpPr>
         <p:spPr>
           <a:xfrm>
-            <a:off x="914400" y="6263640"/>
-            <a:ext cx="10332720" cy="365760"/>
+            <a:off x="731520" y="6263640"/>
+            <a:ext cx="10698480" cy="365760"/>
           </a:xfrm>
           <a:prstGeom prst="rect">
             <a:avLst/>
@@ -4583,14 +4617,14 @@
           </a:bodyPr>
           <a:lstStyle/>
           <a:p>
-            <a:pPr algn="ctr"/>
-            <a:r>
-              <a:rPr sz="1200" b="0">
+            <a:pPr algn="l"/>
+            <a:r>
+              <a:rPr sz="1000" b="0">
                 <a:solidFill>
                   <a:srgbClr val="A1A1AA"/>
                 </a:solidFill>
               </a:rPr>
-              <a:t>Koenig AI Academy</a:t>
+              <a:t>academy.kspl.tech | Koenig AI Academy</a:t>
             </a:r>
           </a:p>
         </p:txBody>
